--- a/figure.pptx
+++ b/figure.pptx
@@ -104,6 +104,11 @@
       </a:defRPr>
     </a:lvl9pPr>
   </p:defaultTextStyle>
+  <p:extLst>
+    <p:ext uri="{EFAFB233-063F-42B5-8137-9DF3F51BA10A}">
+      <p15:sldGuideLst xmlns:p15="http://schemas.microsoft.com/office/powerpoint/2012/main"/>
+    </p:ext>
+  </p:extLst>
 </p:presentation>
 </file>
 
@@ -254,7 +259,7 @@
           <a:p>
             <a:fld id="{571E9255-F9BE-4808-9FE1-8C5FCFF1473D}" type="datetimeFigureOut">
               <a:rPr kumimoji="1" lang="ja-JP" altLang="en-US" smtClean="0"/>
-              <a:t>2025/9/5</a:t>
+              <a:t>2025/9/8</a:t>
             </a:fld>
             <a:endParaRPr kumimoji="1" lang="ja-JP" altLang="en-US"/>
           </a:p>
@@ -484,7 +489,7 @@
           <a:p>
             <a:fld id="{571E9255-F9BE-4808-9FE1-8C5FCFF1473D}" type="datetimeFigureOut">
               <a:rPr kumimoji="1" lang="ja-JP" altLang="en-US" smtClean="0"/>
-              <a:t>2025/9/5</a:t>
+              <a:t>2025/9/8</a:t>
             </a:fld>
             <a:endParaRPr kumimoji="1" lang="ja-JP" altLang="en-US"/>
           </a:p>
@@ -724,7 +729,7 @@
           <a:p>
             <a:fld id="{571E9255-F9BE-4808-9FE1-8C5FCFF1473D}" type="datetimeFigureOut">
               <a:rPr kumimoji="1" lang="ja-JP" altLang="en-US" smtClean="0"/>
-              <a:t>2025/9/5</a:t>
+              <a:t>2025/9/8</a:t>
             </a:fld>
             <a:endParaRPr kumimoji="1" lang="ja-JP" altLang="en-US"/>
           </a:p>
@@ -954,7 +959,7 @@
           <a:p>
             <a:fld id="{571E9255-F9BE-4808-9FE1-8C5FCFF1473D}" type="datetimeFigureOut">
               <a:rPr kumimoji="1" lang="ja-JP" altLang="en-US" smtClean="0"/>
-              <a:t>2025/9/5</a:t>
+              <a:t>2025/9/8</a:t>
             </a:fld>
             <a:endParaRPr kumimoji="1" lang="ja-JP" altLang="en-US"/>
           </a:p>
@@ -1229,7 +1234,7 @@
           <a:p>
             <a:fld id="{571E9255-F9BE-4808-9FE1-8C5FCFF1473D}" type="datetimeFigureOut">
               <a:rPr kumimoji="1" lang="ja-JP" altLang="en-US" smtClean="0"/>
-              <a:t>2025/9/5</a:t>
+              <a:t>2025/9/8</a:t>
             </a:fld>
             <a:endParaRPr kumimoji="1" lang="ja-JP" altLang="en-US"/>
           </a:p>
@@ -1558,7 +1563,7 @@
           <a:p>
             <a:fld id="{571E9255-F9BE-4808-9FE1-8C5FCFF1473D}" type="datetimeFigureOut">
               <a:rPr kumimoji="1" lang="ja-JP" altLang="en-US" smtClean="0"/>
-              <a:t>2025/9/5</a:t>
+              <a:t>2025/9/8</a:t>
             </a:fld>
             <a:endParaRPr kumimoji="1" lang="ja-JP" altLang="en-US"/>
           </a:p>
@@ -2034,7 +2039,7 @@
           <a:p>
             <a:fld id="{571E9255-F9BE-4808-9FE1-8C5FCFF1473D}" type="datetimeFigureOut">
               <a:rPr kumimoji="1" lang="ja-JP" altLang="en-US" smtClean="0"/>
-              <a:t>2025/9/5</a:t>
+              <a:t>2025/9/8</a:t>
             </a:fld>
             <a:endParaRPr kumimoji="1" lang="ja-JP" altLang="en-US"/>
           </a:p>
@@ -2175,7 +2180,7 @@
           <a:p>
             <a:fld id="{571E9255-F9BE-4808-9FE1-8C5FCFF1473D}" type="datetimeFigureOut">
               <a:rPr kumimoji="1" lang="ja-JP" altLang="en-US" smtClean="0"/>
-              <a:t>2025/9/5</a:t>
+              <a:t>2025/9/8</a:t>
             </a:fld>
             <a:endParaRPr kumimoji="1" lang="ja-JP" altLang="en-US"/>
           </a:p>
@@ -2288,7 +2293,7 @@
           <a:p>
             <a:fld id="{571E9255-F9BE-4808-9FE1-8C5FCFF1473D}" type="datetimeFigureOut">
               <a:rPr kumimoji="1" lang="ja-JP" altLang="en-US" smtClean="0"/>
-              <a:t>2025/9/5</a:t>
+              <a:t>2025/9/8</a:t>
             </a:fld>
             <a:endParaRPr kumimoji="1" lang="ja-JP" altLang="en-US"/>
           </a:p>
@@ -2631,7 +2636,7 @@
           <a:p>
             <a:fld id="{571E9255-F9BE-4808-9FE1-8C5FCFF1473D}" type="datetimeFigureOut">
               <a:rPr kumimoji="1" lang="ja-JP" altLang="en-US" smtClean="0"/>
-              <a:t>2025/9/5</a:t>
+              <a:t>2025/9/8</a:t>
             </a:fld>
             <a:endParaRPr kumimoji="1" lang="ja-JP" altLang="en-US"/>
           </a:p>
@@ -2919,7 +2924,7 @@
           <a:p>
             <a:fld id="{571E9255-F9BE-4808-9FE1-8C5FCFF1473D}" type="datetimeFigureOut">
               <a:rPr kumimoji="1" lang="ja-JP" altLang="en-US" smtClean="0"/>
-              <a:t>2025/9/5</a:t>
+              <a:t>2025/9/8</a:t>
             </a:fld>
             <a:endParaRPr kumimoji="1" lang="ja-JP" altLang="en-US"/>
           </a:p>
@@ -3192,7 +3197,7 @@
           <a:p>
             <a:fld id="{571E9255-F9BE-4808-9FE1-8C5FCFF1473D}" type="datetimeFigureOut">
               <a:rPr kumimoji="1" lang="ja-JP" altLang="en-US" smtClean="0"/>
-              <a:t>2025/9/5</a:t>
+              <a:t>2025/9/8</a:t>
             </a:fld>
             <a:endParaRPr kumimoji="1" lang="ja-JP" altLang="en-US"/>
           </a:p>
@@ -3623,7 +3628,7 @@
         </p:nvSpPr>
         <p:spPr>
           <a:xfrm>
-            <a:off x="5604934" y="2931584"/>
+            <a:off x="5653015" y="2931584"/>
             <a:ext cx="279400" cy="279400"/>
           </a:xfrm>
           <a:prstGeom prst="ellipse">
@@ -3667,7 +3672,7 @@
         </p:nvSpPr>
         <p:spPr>
           <a:xfrm>
-            <a:off x="5604934" y="2131484"/>
+            <a:off x="5653015" y="2131484"/>
             <a:ext cx="1015999" cy="800100"/>
           </a:xfrm>
           <a:prstGeom prst="rect">
@@ -3711,7 +3716,7 @@
         </p:nvSpPr>
         <p:spPr>
           <a:xfrm>
-            <a:off x="6337300" y="2931584"/>
+            <a:off x="6385381" y="2931584"/>
             <a:ext cx="279400" cy="279400"/>
           </a:xfrm>
           <a:prstGeom prst="ellipse">
@@ -3755,7 +3760,7 @@
         </p:nvCxnSpPr>
         <p:spPr>
           <a:xfrm>
-            <a:off x="2980267" y="2531534"/>
+            <a:off x="2980267" y="2616371"/>
             <a:ext cx="778933" cy="0"/>
           </a:xfrm>
           <a:prstGeom prst="line">
@@ -3764,16 +3769,16 @@
         </p:spPr>
         <p:style>
           <a:lnRef idx="2">
-            <a:schemeClr val="accent1"/>
+            <a:schemeClr val="dk1"/>
           </a:lnRef>
-          <a:fillRef idx="0">
-            <a:schemeClr val="accent1"/>
+          <a:fillRef idx="1">
+            <a:schemeClr val="lt1"/>
           </a:fillRef>
-          <a:effectRef idx="1">
-            <a:schemeClr val="accent1"/>
+          <a:effectRef idx="0">
+            <a:schemeClr val="dk1"/>
           </a:effectRef>
           <a:fontRef idx="minor">
-            <a:schemeClr val="tx1"/>
+            <a:schemeClr val="dk1"/>
           </a:fontRef>
         </p:style>
       </p:cxnSp>
@@ -3791,7 +3796,7 @@
         </p:nvCxnSpPr>
         <p:spPr>
           <a:xfrm>
-            <a:off x="4826001" y="2531534"/>
+            <a:off x="4861427" y="2580071"/>
             <a:ext cx="778933" cy="0"/>
           </a:xfrm>
           <a:prstGeom prst="line">
@@ -3800,16 +3805,16 @@
         </p:spPr>
         <p:style>
           <a:lnRef idx="2">
-            <a:schemeClr val="accent1"/>
+            <a:schemeClr val="dk1"/>
           </a:lnRef>
-          <a:fillRef idx="0">
-            <a:schemeClr val="accent1"/>
+          <a:fillRef idx="1">
+            <a:schemeClr val="lt1"/>
           </a:fillRef>
-          <a:effectRef idx="1">
-            <a:schemeClr val="accent1"/>
+          <a:effectRef idx="0">
+            <a:schemeClr val="dk1"/>
           </a:effectRef>
           <a:fontRef idx="minor">
-            <a:schemeClr val="tx1"/>
+            <a:schemeClr val="dk1"/>
           </a:fontRef>
         </p:style>
       </p:cxnSp>
@@ -3827,7 +3832,7 @@
         </p:nvCxnSpPr>
         <p:spPr>
           <a:xfrm>
-            <a:off x="3759200" y="2313518"/>
+            <a:off x="3759200" y="2354434"/>
             <a:ext cx="0" cy="427566"/>
           </a:xfrm>
           <a:prstGeom prst="line">
@@ -3836,16 +3841,16 @@
         </p:spPr>
         <p:style>
           <a:lnRef idx="2">
-            <a:schemeClr val="accent1"/>
+            <a:schemeClr val="dk1"/>
           </a:lnRef>
-          <a:fillRef idx="0">
-            <a:schemeClr val="accent1"/>
+          <a:fillRef idx="1">
+            <a:schemeClr val="lt1"/>
           </a:fillRef>
-          <a:effectRef idx="1">
-            <a:schemeClr val="accent1"/>
+          <a:effectRef idx="0">
+            <a:schemeClr val="dk1"/>
           </a:effectRef>
           <a:fontRef idx="minor">
-            <a:schemeClr val="tx1"/>
+            <a:schemeClr val="dk1"/>
           </a:fontRef>
         </p:style>
       </p:cxnSp>
@@ -3863,7 +3868,7 @@
         </p:nvCxnSpPr>
         <p:spPr>
           <a:xfrm>
-            <a:off x="4826001" y="2313518"/>
+            <a:off x="4861562" y="2354434"/>
             <a:ext cx="0" cy="427566"/>
           </a:xfrm>
           <a:prstGeom prst="line">
@@ -3872,16 +3877,16 @@
         </p:spPr>
         <p:style>
           <a:lnRef idx="2">
-            <a:schemeClr val="accent1"/>
+            <a:schemeClr val="dk1"/>
           </a:lnRef>
-          <a:fillRef idx="0">
-            <a:schemeClr val="accent1"/>
+          <a:fillRef idx="1">
+            <a:schemeClr val="lt1"/>
           </a:fillRef>
-          <a:effectRef idx="1">
-            <a:schemeClr val="accent1"/>
+          <a:effectRef idx="0">
+            <a:schemeClr val="dk1"/>
           </a:effectRef>
           <a:fontRef idx="minor">
-            <a:schemeClr val="tx1"/>
+            <a:schemeClr val="dk1"/>
           </a:fontRef>
         </p:style>
       </p:cxnSp>
@@ -4058,6 +4063,1179 @@
           </a:p>
         </p:txBody>
       </p:sp>
+      <p:grpSp>
+        <p:nvGrpSpPr>
+          <p:cNvPr id="2" name="グループ化 1">
+            <a:extLst>
+              <a:ext uri="{FF2B5EF4-FFF2-40B4-BE49-F238E27FC236}">
+                <a16:creationId xmlns:a16="http://schemas.microsoft.com/office/drawing/2014/main" id="{78733574-A2D3-EF6A-A0A4-494D94A68AE8}"/>
+              </a:ext>
+            </a:extLst>
+          </p:cNvPr>
+          <p:cNvGrpSpPr/>
+          <p:nvPr/>
+        </p:nvGrpSpPr>
+        <p:grpSpPr>
+          <a:xfrm rot="16200000">
+            <a:off x="4212359" y="1807072"/>
+            <a:ext cx="192872" cy="1105264"/>
+            <a:chOff x="4794579" y="2524408"/>
+            <a:chExt cx="222764" cy="1462656"/>
+          </a:xfrm>
+        </p:grpSpPr>
+        <p:cxnSp>
+          <p:nvCxnSpPr>
+            <p:cNvPr id="3" name="直線コネクタ 2">
+              <a:extLst>
+                <a:ext uri="{FF2B5EF4-FFF2-40B4-BE49-F238E27FC236}">
+                  <a16:creationId xmlns:a16="http://schemas.microsoft.com/office/drawing/2014/main" id="{A40F8A68-6174-0496-FD64-ACEACEF0956E}"/>
+                </a:ext>
+              </a:extLst>
+            </p:cNvPr>
+            <p:cNvCxnSpPr>
+              <a:cxnSpLocks/>
+            </p:cNvCxnSpPr>
+            <p:nvPr/>
+          </p:nvCxnSpPr>
+          <p:spPr>
+            <a:xfrm rot="5400000">
+              <a:off x="4734322" y="2696047"/>
+              <a:ext cx="343278" cy="0"/>
+            </a:xfrm>
+            <a:prstGeom prst="line">
+              <a:avLst/>
+            </a:prstGeom>
+            <a:ln/>
+          </p:spPr>
+          <p:style>
+            <a:lnRef idx="2">
+              <a:schemeClr val="dk1"/>
+            </a:lnRef>
+            <a:fillRef idx="1">
+              <a:schemeClr val="lt1"/>
+            </a:fillRef>
+            <a:effectRef idx="0">
+              <a:schemeClr val="dk1"/>
+            </a:effectRef>
+            <a:fontRef idx="minor">
+              <a:schemeClr val="dk1"/>
+            </a:fontRef>
+          </p:style>
+        </p:cxnSp>
+        <p:cxnSp>
+          <p:nvCxnSpPr>
+            <p:cNvPr id="4" name="直線コネクタ 3">
+              <a:extLst>
+                <a:ext uri="{FF2B5EF4-FFF2-40B4-BE49-F238E27FC236}">
+                  <a16:creationId xmlns:a16="http://schemas.microsoft.com/office/drawing/2014/main" id="{5B199FFF-C1AE-AC5B-1E84-6492951019E0}"/>
+                </a:ext>
+              </a:extLst>
+            </p:cNvPr>
+            <p:cNvCxnSpPr>
+              <a:cxnSpLocks/>
+            </p:cNvCxnSpPr>
+            <p:nvPr/>
+          </p:nvCxnSpPr>
+          <p:spPr>
+            <a:xfrm rot="5400000">
+              <a:off x="4706272" y="3787375"/>
+              <a:ext cx="399378" cy="0"/>
+            </a:xfrm>
+            <a:prstGeom prst="line">
+              <a:avLst/>
+            </a:prstGeom>
+            <a:ln/>
+          </p:spPr>
+          <p:style>
+            <a:lnRef idx="2">
+              <a:schemeClr val="dk1"/>
+            </a:lnRef>
+            <a:fillRef idx="1">
+              <a:schemeClr val="lt1"/>
+            </a:fillRef>
+            <a:effectRef idx="0">
+              <a:schemeClr val="dk1"/>
+            </a:effectRef>
+            <a:fontRef idx="minor">
+              <a:schemeClr val="dk1"/>
+            </a:fontRef>
+          </p:style>
+        </p:cxnSp>
+        <p:grpSp>
+          <p:nvGrpSpPr>
+            <p:cNvPr id="6" name="グループ化 5">
+              <a:extLst>
+                <a:ext uri="{FF2B5EF4-FFF2-40B4-BE49-F238E27FC236}">
+                  <a16:creationId xmlns:a16="http://schemas.microsoft.com/office/drawing/2014/main" id="{AD1FCA45-7826-8182-7FB0-745F6B37DBD5}"/>
+                </a:ext>
+              </a:extLst>
+            </p:cNvPr>
+            <p:cNvGrpSpPr/>
+            <p:nvPr/>
+          </p:nvGrpSpPr>
+          <p:grpSpPr>
+            <a:xfrm>
+              <a:off x="4794579" y="2867685"/>
+              <a:ext cx="222764" cy="720000"/>
+              <a:chOff x="4815961" y="2867686"/>
+              <a:chExt cx="180000" cy="510700"/>
+            </a:xfrm>
+          </p:grpSpPr>
+          <p:cxnSp>
+            <p:nvCxnSpPr>
+              <p:cNvPr id="9" name="直線コネクタ 8">
+                <a:extLst>
+                  <a:ext uri="{FF2B5EF4-FFF2-40B4-BE49-F238E27FC236}">
+                    <a16:creationId xmlns:a16="http://schemas.microsoft.com/office/drawing/2014/main" id="{918423D7-5790-6605-792E-4202374AD8D7}"/>
+                  </a:ext>
+                </a:extLst>
+              </p:cNvPr>
+              <p:cNvCxnSpPr/>
+              <p:nvPr/>
+            </p:nvCxnSpPr>
+            <p:spPr>
+              <a:xfrm>
+                <a:off x="4905961" y="2867686"/>
+                <a:ext cx="90000" cy="25557"/>
+              </a:xfrm>
+              <a:prstGeom prst="line">
+                <a:avLst/>
+              </a:prstGeom>
+              <a:ln/>
+            </p:spPr>
+            <p:style>
+              <a:lnRef idx="2">
+                <a:schemeClr val="dk1"/>
+              </a:lnRef>
+              <a:fillRef idx="1">
+                <a:schemeClr val="lt1"/>
+              </a:fillRef>
+              <a:effectRef idx="0">
+                <a:schemeClr val="dk1"/>
+              </a:effectRef>
+              <a:fontRef idx="minor">
+                <a:schemeClr val="dk1"/>
+              </a:fontRef>
+            </p:style>
+          </p:cxnSp>
+          <p:cxnSp>
+            <p:nvCxnSpPr>
+              <p:cNvPr id="10" name="直線コネクタ 9">
+                <a:extLst>
+                  <a:ext uri="{FF2B5EF4-FFF2-40B4-BE49-F238E27FC236}">
+                    <a16:creationId xmlns:a16="http://schemas.microsoft.com/office/drawing/2014/main" id="{7AF8D8B5-8726-78EB-F41B-AFFE048781E9}"/>
+                  </a:ext>
+                </a:extLst>
+              </p:cNvPr>
+              <p:cNvCxnSpPr/>
+              <p:nvPr/>
+            </p:nvCxnSpPr>
+            <p:spPr>
+              <a:xfrm flipH="1">
+                <a:off x="4815961" y="2892019"/>
+                <a:ext cx="180000" cy="54183"/>
+              </a:xfrm>
+              <a:prstGeom prst="line">
+                <a:avLst/>
+              </a:prstGeom>
+              <a:ln/>
+            </p:spPr>
+            <p:style>
+              <a:lnRef idx="2">
+                <a:schemeClr val="dk1"/>
+              </a:lnRef>
+              <a:fillRef idx="1">
+                <a:schemeClr val="lt1"/>
+              </a:fillRef>
+              <a:effectRef idx="0">
+                <a:schemeClr val="dk1"/>
+              </a:effectRef>
+              <a:fontRef idx="minor">
+                <a:schemeClr val="dk1"/>
+              </a:fontRef>
+            </p:style>
+          </p:cxnSp>
+          <p:cxnSp>
+            <p:nvCxnSpPr>
+              <p:cNvPr id="13" name="直線コネクタ 12">
+                <a:extLst>
+                  <a:ext uri="{FF2B5EF4-FFF2-40B4-BE49-F238E27FC236}">
+                    <a16:creationId xmlns:a16="http://schemas.microsoft.com/office/drawing/2014/main" id="{A6BC16F7-AA65-6710-7730-8106CFDB39C0}"/>
+                  </a:ext>
+                </a:extLst>
+              </p:cNvPr>
+              <p:cNvCxnSpPr/>
+              <p:nvPr/>
+            </p:nvCxnSpPr>
+            <p:spPr>
+              <a:xfrm>
+                <a:off x="4815961" y="2946202"/>
+                <a:ext cx="180000" cy="51115"/>
+              </a:xfrm>
+              <a:prstGeom prst="line">
+                <a:avLst/>
+              </a:prstGeom>
+              <a:ln/>
+            </p:spPr>
+            <p:style>
+              <a:lnRef idx="2">
+                <a:schemeClr val="dk1"/>
+              </a:lnRef>
+              <a:fillRef idx="1">
+                <a:schemeClr val="lt1"/>
+              </a:fillRef>
+              <a:effectRef idx="0">
+                <a:schemeClr val="dk1"/>
+              </a:effectRef>
+              <a:fontRef idx="minor">
+                <a:schemeClr val="dk1"/>
+              </a:fontRef>
+            </p:style>
+          </p:cxnSp>
+          <p:cxnSp>
+            <p:nvCxnSpPr>
+              <p:cNvPr id="16" name="直線コネクタ 15">
+                <a:extLst>
+                  <a:ext uri="{FF2B5EF4-FFF2-40B4-BE49-F238E27FC236}">
+                    <a16:creationId xmlns:a16="http://schemas.microsoft.com/office/drawing/2014/main" id="{87E82FFF-19E3-5FF5-C878-D8576302F5D8}"/>
+                  </a:ext>
+                </a:extLst>
+              </p:cNvPr>
+              <p:cNvCxnSpPr/>
+              <p:nvPr/>
+            </p:nvCxnSpPr>
+            <p:spPr>
+              <a:xfrm>
+                <a:off x="4815961" y="3352829"/>
+                <a:ext cx="90000" cy="25557"/>
+              </a:xfrm>
+              <a:prstGeom prst="line">
+                <a:avLst/>
+              </a:prstGeom>
+              <a:ln/>
+            </p:spPr>
+            <p:style>
+              <a:lnRef idx="2">
+                <a:schemeClr val="dk1"/>
+              </a:lnRef>
+              <a:fillRef idx="1">
+                <a:schemeClr val="lt1"/>
+              </a:fillRef>
+              <a:effectRef idx="0">
+                <a:schemeClr val="dk1"/>
+              </a:effectRef>
+              <a:fontRef idx="minor">
+                <a:schemeClr val="dk1"/>
+              </a:fontRef>
+            </p:style>
+          </p:cxnSp>
+          <p:cxnSp>
+            <p:nvCxnSpPr>
+              <p:cNvPr id="17" name="直線コネクタ 16">
+                <a:extLst>
+                  <a:ext uri="{FF2B5EF4-FFF2-40B4-BE49-F238E27FC236}">
+                    <a16:creationId xmlns:a16="http://schemas.microsoft.com/office/drawing/2014/main" id="{898A7740-EFEA-3A8E-F61A-B6938B3FB8D9}"/>
+                  </a:ext>
+                </a:extLst>
+              </p:cNvPr>
+              <p:cNvCxnSpPr/>
+              <p:nvPr/>
+            </p:nvCxnSpPr>
+            <p:spPr>
+              <a:xfrm flipH="1">
+                <a:off x="4815961" y="2996092"/>
+                <a:ext cx="180000" cy="54183"/>
+              </a:xfrm>
+              <a:prstGeom prst="line">
+                <a:avLst/>
+              </a:prstGeom>
+              <a:ln/>
+            </p:spPr>
+            <p:style>
+              <a:lnRef idx="2">
+                <a:schemeClr val="dk1"/>
+              </a:lnRef>
+              <a:fillRef idx="1">
+                <a:schemeClr val="lt1"/>
+              </a:fillRef>
+              <a:effectRef idx="0">
+                <a:schemeClr val="dk1"/>
+              </a:effectRef>
+              <a:fontRef idx="minor">
+                <a:schemeClr val="dk1"/>
+              </a:fontRef>
+            </p:style>
+          </p:cxnSp>
+          <p:cxnSp>
+            <p:nvCxnSpPr>
+              <p:cNvPr id="18" name="直線コネクタ 17">
+                <a:extLst>
+                  <a:ext uri="{FF2B5EF4-FFF2-40B4-BE49-F238E27FC236}">
+                    <a16:creationId xmlns:a16="http://schemas.microsoft.com/office/drawing/2014/main" id="{96C85D30-69B2-BCD1-92CF-7C5EE8459775}"/>
+                  </a:ext>
+                </a:extLst>
+              </p:cNvPr>
+              <p:cNvCxnSpPr/>
+              <p:nvPr/>
+            </p:nvCxnSpPr>
+            <p:spPr>
+              <a:xfrm>
+                <a:off x="4815961" y="3050275"/>
+                <a:ext cx="180000" cy="51115"/>
+              </a:xfrm>
+              <a:prstGeom prst="line">
+                <a:avLst/>
+              </a:prstGeom>
+              <a:ln/>
+            </p:spPr>
+            <p:style>
+              <a:lnRef idx="2">
+                <a:schemeClr val="dk1"/>
+              </a:lnRef>
+              <a:fillRef idx="1">
+                <a:schemeClr val="lt1"/>
+              </a:fillRef>
+              <a:effectRef idx="0">
+                <a:schemeClr val="dk1"/>
+              </a:effectRef>
+              <a:fontRef idx="minor">
+                <a:schemeClr val="dk1"/>
+              </a:fontRef>
+            </p:style>
+          </p:cxnSp>
+          <p:cxnSp>
+            <p:nvCxnSpPr>
+              <p:cNvPr id="20" name="直線コネクタ 19">
+                <a:extLst>
+                  <a:ext uri="{FF2B5EF4-FFF2-40B4-BE49-F238E27FC236}">
+                    <a16:creationId xmlns:a16="http://schemas.microsoft.com/office/drawing/2014/main" id="{34B67997-CD1B-59C4-6D3A-E8A6CE410EB2}"/>
+                  </a:ext>
+                </a:extLst>
+              </p:cNvPr>
+              <p:cNvCxnSpPr/>
+              <p:nvPr/>
+            </p:nvCxnSpPr>
+            <p:spPr>
+              <a:xfrm flipH="1">
+                <a:off x="4815961" y="3100165"/>
+                <a:ext cx="180000" cy="54183"/>
+              </a:xfrm>
+              <a:prstGeom prst="line">
+                <a:avLst/>
+              </a:prstGeom>
+              <a:ln/>
+            </p:spPr>
+            <p:style>
+              <a:lnRef idx="2">
+                <a:schemeClr val="dk1"/>
+              </a:lnRef>
+              <a:fillRef idx="1">
+                <a:schemeClr val="lt1"/>
+              </a:fillRef>
+              <a:effectRef idx="0">
+                <a:schemeClr val="dk1"/>
+              </a:effectRef>
+              <a:fontRef idx="minor">
+                <a:schemeClr val="dk1"/>
+              </a:fontRef>
+            </p:style>
+          </p:cxnSp>
+          <p:cxnSp>
+            <p:nvCxnSpPr>
+              <p:cNvPr id="22" name="直線コネクタ 21">
+                <a:extLst>
+                  <a:ext uri="{FF2B5EF4-FFF2-40B4-BE49-F238E27FC236}">
+                    <a16:creationId xmlns:a16="http://schemas.microsoft.com/office/drawing/2014/main" id="{998E8921-F93E-1F0B-5D71-C83FF3DD0FDE}"/>
+                  </a:ext>
+                </a:extLst>
+              </p:cNvPr>
+              <p:cNvCxnSpPr/>
+              <p:nvPr/>
+            </p:nvCxnSpPr>
+            <p:spPr>
+              <a:xfrm flipH="1">
+                <a:off x="4815961" y="3298646"/>
+                <a:ext cx="180000" cy="54183"/>
+              </a:xfrm>
+              <a:prstGeom prst="line">
+                <a:avLst/>
+              </a:prstGeom>
+              <a:ln/>
+            </p:spPr>
+            <p:style>
+              <a:lnRef idx="2">
+                <a:schemeClr val="dk1"/>
+              </a:lnRef>
+              <a:fillRef idx="1">
+                <a:schemeClr val="lt1"/>
+              </a:fillRef>
+              <a:effectRef idx="0">
+                <a:schemeClr val="dk1"/>
+              </a:effectRef>
+              <a:fontRef idx="minor">
+                <a:schemeClr val="dk1"/>
+              </a:fontRef>
+            </p:style>
+          </p:cxnSp>
+          <p:cxnSp>
+            <p:nvCxnSpPr>
+              <p:cNvPr id="23" name="直線コネクタ 22">
+                <a:extLst>
+                  <a:ext uri="{FF2B5EF4-FFF2-40B4-BE49-F238E27FC236}">
+                    <a16:creationId xmlns:a16="http://schemas.microsoft.com/office/drawing/2014/main" id="{38DF6BAD-D911-31F0-1304-346FA04A993E}"/>
+                  </a:ext>
+                </a:extLst>
+              </p:cNvPr>
+              <p:cNvCxnSpPr/>
+              <p:nvPr/>
+            </p:nvCxnSpPr>
+            <p:spPr>
+              <a:xfrm>
+                <a:off x="4815961" y="3153123"/>
+                <a:ext cx="180000" cy="51115"/>
+              </a:xfrm>
+              <a:prstGeom prst="line">
+                <a:avLst/>
+              </a:prstGeom>
+              <a:ln/>
+            </p:spPr>
+            <p:style>
+              <a:lnRef idx="2">
+                <a:schemeClr val="dk1"/>
+              </a:lnRef>
+              <a:fillRef idx="1">
+                <a:schemeClr val="lt1"/>
+              </a:fillRef>
+              <a:effectRef idx="0">
+                <a:schemeClr val="dk1"/>
+              </a:effectRef>
+              <a:fontRef idx="minor">
+                <a:schemeClr val="dk1"/>
+              </a:fontRef>
+            </p:style>
+          </p:cxnSp>
+          <p:cxnSp>
+            <p:nvCxnSpPr>
+              <p:cNvPr id="24" name="直線コネクタ 23">
+                <a:extLst>
+                  <a:ext uri="{FF2B5EF4-FFF2-40B4-BE49-F238E27FC236}">
+                    <a16:creationId xmlns:a16="http://schemas.microsoft.com/office/drawing/2014/main" id="{5677FEFC-EE46-2C43-98C1-BC0747048BC2}"/>
+                  </a:ext>
+                </a:extLst>
+              </p:cNvPr>
+              <p:cNvCxnSpPr/>
+              <p:nvPr/>
+            </p:nvCxnSpPr>
+            <p:spPr>
+              <a:xfrm flipH="1">
+                <a:off x="4815961" y="3203013"/>
+                <a:ext cx="180000" cy="54183"/>
+              </a:xfrm>
+              <a:prstGeom prst="line">
+                <a:avLst/>
+              </a:prstGeom>
+              <a:ln/>
+            </p:spPr>
+            <p:style>
+              <a:lnRef idx="2">
+                <a:schemeClr val="dk1"/>
+              </a:lnRef>
+              <a:fillRef idx="1">
+                <a:schemeClr val="lt1"/>
+              </a:fillRef>
+              <a:effectRef idx="0">
+                <a:schemeClr val="dk1"/>
+              </a:effectRef>
+              <a:fontRef idx="minor">
+                <a:schemeClr val="dk1"/>
+              </a:fontRef>
+            </p:style>
+          </p:cxnSp>
+          <p:cxnSp>
+            <p:nvCxnSpPr>
+              <p:cNvPr id="25" name="直線コネクタ 24">
+                <a:extLst>
+                  <a:ext uri="{FF2B5EF4-FFF2-40B4-BE49-F238E27FC236}">
+                    <a16:creationId xmlns:a16="http://schemas.microsoft.com/office/drawing/2014/main" id="{0B4E6EC0-7557-0487-5949-7547B3E8F6A4}"/>
+                  </a:ext>
+                </a:extLst>
+              </p:cNvPr>
+              <p:cNvCxnSpPr/>
+              <p:nvPr/>
+            </p:nvCxnSpPr>
+            <p:spPr>
+              <a:xfrm>
+                <a:off x="4815961" y="3252976"/>
+                <a:ext cx="180000" cy="51115"/>
+              </a:xfrm>
+              <a:prstGeom prst="line">
+                <a:avLst/>
+              </a:prstGeom>
+              <a:ln/>
+            </p:spPr>
+            <p:style>
+              <a:lnRef idx="2">
+                <a:schemeClr val="dk1"/>
+              </a:lnRef>
+              <a:fillRef idx="1">
+                <a:schemeClr val="lt1"/>
+              </a:fillRef>
+              <a:effectRef idx="0">
+                <a:schemeClr val="dk1"/>
+              </a:effectRef>
+              <a:fontRef idx="minor">
+                <a:schemeClr val="dk1"/>
+              </a:fontRef>
+            </p:style>
+          </p:cxnSp>
+        </p:grpSp>
+      </p:grpSp>
+      <p:cxnSp>
+        <p:nvCxnSpPr>
+          <p:cNvPr id="28" name="直線コネクタ 27">
+            <a:extLst>
+              <a:ext uri="{FF2B5EF4-FFF2-40B4-BE49-F238E27FC236}">
+                <a16:creationId xmlns:a16="http://schemas.microsoft.com/office/drawing/2014/main" id="{8779E123-79AD-7D86-98B6-155ED2ABC99A}"/>
+              </a:ext>
+            </a:extLst>
+          </p:cNvPr>
+          <p:cNvCxnSpPr>
+            <a:cxnSpLocks/>
+          </p:cNvCxnSpPr>
+          <p:nvPr/>
+        </p:nvCxnSpPr>
+        <p:spPr>
+          <a:xfrm>
+            <a:off x="4401663" y="2782000"/>
+            <a:ext cx="459764" cy="0"/>
+          </a:xfrm>
+          <a:prstGeom prst="line">
+            <a:avLst/>
+          </a:prstGeom>
+        </p:spPr>
+        <p:style>
+          <a:lnRef idx="2">
+            <a:schemeClr val="dk1"/>
+          </a:lnRef>
+          <a:fillRef idx="1">
+            <a:schemeClr val="lt1"/>
+          </a:fillRef>
+          <a:effectRef idx="0">
+            <a:schemeClr val="dk1"/>
+          </a:effectRef>
+          <a:fontRef idx="minor">
+            <a:schemeClr val="dk1"/>
+          </a:fontRef>
+        </p:style>
+      </p:cxnSp>
+      <p:grpSp>
+        <p:nvGrpSpPr>
+          <p:cNvPr id="37" name="グループ化 36">
+            <a:extLst>
+              <a:ext uri="{FF2B5EF4-FFF2-40B4-BE49-F238E27FC236}">
+                <a16:creationId xmlns:a16="http://schemas.microsoft.com/office/drawing/2014/main" id="{82BB2269-0963-655B-1495-80D9E66498F5}"/>
+              </a:ext>
+            </a:extLst>
+          </p:cNvPr>
+          <p:cNvGrpSpPr/>
+          <p:nvPr/>
+        </p:nvGrpSpPr>
+        <p:grpSpPr>
+          <a:xfrm>
+            <a:off x="3957874" y="2606275"/>
+            <a:ext cx="520525" cy="359282"/>
+            <a:chOff x="4046042" y="2517522"/>
+            <a:chExt cx="520525" cy="359282"/>
+          </a:xfrm>
+        </p:grpSpPr>
+        <p:sp>
+          <p:nvSpPr>
+            <p:cNvPr id="30" name="正方形/長方形 29">
+              <a:extLst>
+                <a:ext uri="{FF2B5EF4-FFF2-40B4-BE49-F238E27FC236}">
+                  <a16:creationId xmlns:a16="http://schemas.microsoft.com/office/drawing/2014/main" id="{947551B0-0289-00A9-6697-B3B2A1F1D519}"/>
+                </a:ext>
+              </a:extLst>
+            </p:cNvPr>
+            <p:cNvSpPr/>
+            <p:nvPr/>
+          </p:nvSpPr>
+          <p:spPr>
+            <a:xfrm>
+              <a:off x="4109958" y="2584621"/>
+              <a:ext cx="456609" cy="201929"/>
+            </a:xfrm>
+            <a:prstGeom prst="rect">
+              <a:avLst/>
+            </a:prstGeom>
+          </p:spPr>
+          <p:style>
+            <a:lnRef idx="2">
+              <a:schemeClr val="dk1"/>
+            </a:lnRef>
+            <a:fillRef idx="1">
+              <a:schemeClr val="lt1"/>
+            </a:fillRef>
+            <a:effectRef idx="0">
+              <a:schemeClr val="dk1"/>
+            </a:effectRef>
+            <a:fontRef idx="minor">
+              <a:schemeClr val="dk1"/>
+            </a:fontRef>
+          </p:style>
+          <p:txBody>
+            <a:bodyPr rtlCol="0" anchor="ctr"/>
+            <a:lstStyle/>
+            <a:p>
+              <a:pPr algn="ctr"/>
+              <a:endParaRPr kumimoji="1" lang="ja-JP" altLang="en-US"/>
+            </a:p>
+          </p:txBody>
+        </p:sp>
+        <p:sp>
+          <p:nvSpPr>
+            <p:cNvPr id="32" name="正方形/長方形 31">
+              <a:extLst>
+                <a:ext uri="{FF2B5EF4-FFF2-40B4-BE49-F238E27FC236}">
+                  <a16:creationId xmlns:a16="http://schemas.microsoft.com/office/drawing/2014/main" id="{67EB3EFA-CDC7-EA88-EDCB-75546DAE21DD}"/>
+                </a:ext>
+              </a:extLst>
+            </p:cNvPr>
+            <p:cNvSpPr/>
+            <p:nvPr/>
+          </p:nvSpPr>
+          <p:spPr>
+            <a:xfrm>
+              <a:off x="4046042" y="2517522"/>
+              <a:ext cx="139305" cy="359282"/>
+            </a:xfrm>
+            <a:prstGeom prst="rect">
+              <a:avLst/>
+            </a:prstGeom>
+            <a:ln>
+              <a:solidFill>
+                <a:schemeClr val="bg1"/>
+              </a:solidFill>
+            </a:ln>
+          </p:spPr>
+          <p:style>
+            <a:lnRef idx="2">
+              <a:schemeClr val="dk1"/>
+            </a:lnRef>
+            <a:fillRef idx="1">
+              <a:schemeClr val="lt1"/>
+            </a:fillRef>
+            <a:effectRef idx="0">
+              <a:schemeClr val="dk1"/>
+            </a:effectRef>
+            <a:fontRef idx="minor">
+              <a:schemeClr val="dk1"/>
+            </a:fontRef>
+          </p:style>
+          <p:txBody>
+            <a:bodyPr rtlCol="0" anchor="ctr"/>
+            <a:lstStyle/>
+            <a:p>
+              <a:pPr algn="ctr"/>
+              <a:endParaRPr kumimoji="1" lang="ja-JP" altLang="en-US"/>
+            </a:p>
+          </p:txBody>
+        </p:sp>
+      </p:grpSp>
+      <p:cxnSp>
+        <p:nvCxnSpPr>
+          <p:cNvPr id="33" name="直線コネクタ 32">
+            <a:extLst>
+              <a:ext uri="{FF2B5EF4-FFF2-40B4-BE49-F238E27FC236}">
+                <a16:creationId xmlns:a16="http://schemas.microsoft.com/office/drawing/2014/main" id="{D9CCC10B-BA33-5A59-52BF-38BE00F5035B}"/>
+              </a:ext>
+            </a:extLst>
+          </p:cNvPr>
+          <p:cNvCxnSpPr>
+            <a:cxnSpLocks/>
+          </p:cNvCxnSpPr>
+          <p:nvPr/>
+        </p:nvCxnSpPr>
+        <p:spPr>
+          <a:xfrm>
+            <a:off x="4230169" y="2669458"/>
+            <a:ext cx="0" cy="201929"/>
+          </a:xfrm>
+          <a:prstGeom prst="line">
+            <a:avLst/>
+          </a:prstGeom>
+        </p:spPr>
+        <p:style>
+          <a:lnRef idx="2">
+            <a:schemeClr val="dk1"/>
+          </a:lnRef>
+          <a:fillRef idx="1">
+            <a:schemeClr val="lt1"/>
+          </a:fillRef>
+          <a:effectRef idx="0">
+            <a:schemeClr val="dk1"/>
+          </a:effectRef>
+          <a:fontRef idx="minor">
+            <a:schemeClr val="dk1"/>
+          </a:fontRef>
+        </p:style>
+      </p:cxnSp>
+      <p:cxnSp>
+        <p:nvCxnSpPr>
+          <p:cNvPr id="35" name="直線コネクタ 34">
+            <a:extLst>
+              <a:ext uri="{FF2B5EF4-FFF2-40B4-BE49-F238E27FC236}">
+                <a16:creationId xmlns:a16="http://schemas.microsoft.com/office/drawing/2014/main" id="{2B785240-CFFF-9E93-8143-76948FC39520}"/>
+              </a:ext>
+            </a:extLst>
+          </p:cNvPr>
+          <p:cNvCxnSpPr>
+            <a:cxnSpLocks/>
+          </p:cNvCxnSpPr>
+          <p:nvPr/>
+        </p:nvCxnSpPr>
+        <p:spPr>
+          <a:xfrm>
+            <a:off x="3753473" y="2774540"/>
+            <a:ext cx="483837" cy="0"/>
+          </a:xfrm>
+          <a:prstGeom prst="line">
+            <a:avLst/>
+          </a:prstGeom>
+        </p:spPr>
+        <p:style>
+          <a:lnRef idx="2">
+            <a:schemeClr val="dk1"/>
+          </a:lnRef>
+          <a:fillRef idx="1">
+            <a:schemeClr val="lt1"/>
+          </a:fillRef>
+          <a:effectRef idx="0">
+            <a:schemeClr val="dk1"/>
+          </a:effectRef>
+          <a:fontRef idx="minor">
+            <a:schemeClr val="dk1"/>
+          </a:fontRef>
+        </p:style>
+      </p:cxnSp>
+      <mc:AlternateContent xmlns:mc="http://schemas.openxmlformats.org/markup-compatibility/2006">
+        <mc:Choice xmlns:a14="http://schemas.microsoft.com/office/drawing/2010/main" Requires="a14">
+          <p:sp>
+            <p:nvSpPr>
+              <p:cNvPr id="42" name="テキスト ボックス 41">
+                <a:extLst>
+                  <a:ext uri="{FF2B5EF4-FFF2-40B4-BE49-F238E27FC236}">
+                    <a16:creationId xmlns:a16="http://schemas.microsoft.com/office/drawing/2014/main" id="{B0549E9B-56E7-05F9-5C56-1B0D0FDB9F40}"/>
+                  </a:ext>
+                </a:extLst>
+              </p:cNvPr>
+              <p:cNvSpPr txBox="1"/>
+              <p:nvPr/>
+            </p:nvSpPr>
+            <p:spPr>
+              <a:xfrm>
+                <a:off x="6020746" y="2429717"/>
+                <a:ext cx="263662" cy="276999"/>
+              </a:xfrm>
+              <a:prstGeom prst="rect">
+                <a:avLst/>
+              </a:prstGeom>
+              <a:noFill/>
+            </p:spPr>
+            <p:txBody>
+              <a:bodyPr wrap="none" lIns="0" tIns="0" rIns="0" bIns="0" rtlCol="0">
+                <a:spAutoFit/>
+              </a:bodyPr>
+              <a:lstStyle/>
+              <a:p>
+                <a14:m>
+                  <m:oMathPara xmlns:m="http://schemas.openxmlformats.org/officeDocument/2006/math">
+                    <m:oMathParaPr>
+                      <m:jc m:val="centerGroup"/>
+                    </m:oMathParaPr>
+                    <m:oMath xmlns:m="http://schemas.openxmlformats.org/officeDocument/2006/math">
+                      <m:r>
+                        <a:rPr kumimoji="1" lang="en-US" altLang="ja-JP" b="0" i="1" smtClean="0">
+                          <a:latin typeface="Cambria Math" panose="02040503050406030204" pitchFamily="18" charset="0"/>
+                        </a:rPr>
+                        <m:t>𝑚</m:t>
+                      </m:r>
+                    </m:oMath>
+                  </m:oMathPara>
+                </a14:m>
+                <a:endParaRPr kumimoji="1" lang="ja-JP" altLang="en-US" dirty="0"/>
+              </a:p>
+            </p:txBody>
+          </p:sp>
+        </mc:Choice>
+        <mc:Fallback>
+          <p:sp>
+            <p:nvSpPr>
+              <p:cNvPr id="42" name="テキスト ボックス 41">
+                <a:extLst>
+                  <a:ext uri="{FF2B5EF4-FFF2-40B4-BE49-F238E27FC236}">
+                    <a16:creationId xmlns:a16="http://schemas.microsoft.com/office/drawing/2014/main" id="{B0549E9B-56E7-05F9-5C56-1B0D0FDB9F40}"/>
+                  </a:ext>
+                </a:extLst>
+              </p:cNvPr>
+              <p:cNvSpPr txBox="1">
+                <a:spLocks noRot="1" noChangeAspect="1" noMove="1" noResize="1" noEditPoints="1" noAdjustHandles="1" noChangeArrowheads="1" noChangeShapeType="1" noTextEdit="1"/>
+              </p:cNvSpPr>
+              <p:nvPr/>
+            </p:nvSpPr>
+            <p:spPr>
+              <a:xfrm>
+                <a:off x="6020746" y="2429717"/>
+                <a:ext cx="263662" cy="276999"/>
+              </a:xfrm>
+              <a:prstGeom prst="rect">
+                <a:avLst/>
+              </a:prstGeom>
+              <a:blipFill>
+                <a:blip r:embed="rId2"/>
+                <a:stretch>
+                  <a:fillRect l="-9302" r="-11628"/>
+                </a:stretch>
+              </a:blipFill>
+            </p:spPr>
+            <p:txBody>
+              <a:bodyPr/>
+              <a:lstStyle/>
+              <a:p>
+                <a:r>
+                  <a:rPr lang="ja-JP" altLang="en-US">
+                    <a:noFill/>
+                  </a:rPr>
+                  <a:t> </a:t>
+                </a:r>
+              </a:p>
+            </p:txBody>
+          </p:sp>
+        </mc:Fallback>
+      </mc:AlternateContent>
+      <mc:AlternateContent xmlns:mc="http://schemas.openxmlformats.org/markup-compatibility/2006">
+        <mc:Choice xmlns:a14="http://schemas.microsoft.com/office/drawing/2010/main" Requires="a14">
+          <p:sp>
+            <p:nvSpPr>
+              <p:cNvPr id="43" name="テキスト ボックス 42">
+                <a:extLst>
+                  <a:ext uri="{FF2B5EF4-FFF2-40B4-BE49-F238E27FC236}">
+                    <a16:creationId xmlns:a16="http://schemas.microsoft.com/office/drawing/2014/main" id="{B9CA8483-71D6-F078-02F2-192C63D310DD}"/>
+                  </a:ext>
+                </a:extLst>
+              </p:cNvPr>
+              <p:cNvSpPr txBox="1"/>
+              <p:nvPr/>
+            </p:nvSpPr>
+            <p:spPr>
+              <a:xfrm>
+                <a:off x="4149675" y="1961838"/>
+                <a:ext cx="199092" cy="276999"/>
+              </a:xfrm>
+              <a:prstGeom prst="rect">
+                <a:avLst/>
+              </a:prstGeom>
+              <a:noFill/>
+            </p:spPr>
+            <p:txBody>
+              <a:bodyPr wrap="none" lIns="0" tIns="0" rIns="0" bIns="0" rtlCol="0">
+                <a:spAutoFit/>
+              </a:bodyPr>
+              <a:lstStyle/>
+              <a:p>
+                <a14:m>
+                  <m:oMathPara xmlns:m="http://schemas.openxmlformats.org/officeDocument/2006/math">
+                    <m:oMathParaPr>
+                      <m:jc m:val="centerGroup"/>
+                    </m:oMathParaPr>
+                    <m:oMath xmlns:m="http://schemas.openxmlformats.org/officeDocument/2006/math">
+                      <m:r>
+                        <a:rPr kumimoji="1" lang="en-US" altLang="ja-JP" b="0" i="1" smtClean="0">
+                          <a:latin typeface="Cambria Math" panose="02040503050406030204" pitchFamily="18" charset="0"/>
+                        </a:rPr>
+                        <m:t>𝑘</m:t>
+                      </m:r>
+                    </m:oMath>
+                  </m:oMathPara>
+                </a14:m>
+                <a:endParaRPr kumimoji="1" lang="ja-JP" altLang="en-US" dirty="0"/>
+              </a:p>
+            </p:txBody>
+          </p:sp>
+        </mc:Choice>
+        <mc:Fallback>
+          <p:sp>
+            <p:nvSpPr>
+              <p:cNvPr id="43" name="テキスト ボックス 42">
+                <a:extLst>
+                  <a:ext uri="{FF2B5EF4-FFF2-40B4-BE49-F238E27FC236}">
+                    <a16:creationId xmlns:a16="http://schemas.microsoft.com/office/drawing/2014/main" id="{B9CA8483-71D6-F078-02F2-192C63D310DD}"/>
+                  </a:ext>
+                </a:extLst>
+              </p:cNvPr>
+              <p:cNvSpPr txBox="1">
+                <a:spLocks noRot="1" noChangeAspect="1" noMove="1" noResize="1" noEditPoints="1" noAdjustHandles="1" noChangeArrowheads="1" noChangeShapeType="1" noTextEdit="1"/>
+              </p:cNvSpPr>
+              <p:nvPr/>
+            </p:nvSpPr>
+            <p:spPr>
+              <a:xfrm>
+                <a:off x="4149675" y="1961838"/>
+                <a:ext cx="199092" cy="276999"/>
+              </a:xfrm>
+              <a:prstGeom prst="rect">
+                <a:avLst/>
+              </a:prstGeom>
+              <a:blipFill>
+                <a:blip r:embed="rId3"/>
+                <a:stretch>
+                  <a:fillRect l="-28125" r="-25000" b="-8889"/>
+                </a:stretch>
+              </a:blipFill>
+            </p:spPr>
+            <p:txBody>
+              <a:bodyPr/>
+              <a:lstStyle/>
+              <a:p>
+                <a:r>
+                  <a:rPr lang="ja-JP" altLang="en-US">
+                    <a:noFill/>
+                  </a:rPr>
+                  <a:t> </a:t>
+                </a:r>
+              </a:p>
+            </p:txBody>
+          </p:sp>
+        </mc:Fallback>
+      </mc:AlternateContent>
+      <mc:AlternateContent xmlns:mc="http://schemas.openxmlformats.org/markup-compatibility/2006">
+        <mc:Choice xmlns:a14="http://schemas.microsoft.com/office/drawing/2010/main" Requires="a14">
+          <p:sp>
+            <p:nvSpPr>
+              <p:cNvPr id="44" name="テキスト ボックス 43">
+                <a:extLst>
+                  <a:ext uri="{FF2B5EF4-FFF2-40B4-BE49-F238E27FC236}">
+                    <a16:creationId xmlns:a16="http://schemas.microsoft.com/office/drawing/2014/main" id="{FC2BED75-0C32-F77A-E9B9-5B51121FBB47}"/>
+                  </a:ext>
+                </a:extLst>
+              </p:cNvPr>
+              <p:cNvSpPr txBox="1"/>
+              <p:nvPr/>
+            </p:nvSpPr>
+            <p:spPr>
+              <a:xfrm>
+                <a:off x="4149675" y="2889555"/>
+                <a:ext cx="178832" cy="276999"/>
+              </a:xfrm>
+              <a:prstGeom prst="rect">
+                <a:avLst/>
+              </a:prstGeom>
+              <a:noFill/>
+            </p:spPr>
+            <p:txBody>
+              <a:bodyPr wrap="none" lIns="0" tIns="0" rIns="0" bIns="0" rtlCol="0">
+                <a:spAutoFit/>
+              </a:bodyPr>
+              <a:lstStyle/>
+              <a:p>
+                <a14:m>
+                  <m:oMathPara xmlns:m="http://schemas.openxmlformats.org/officeDocument/2006/math">
+                    <m:oMathParaPr>
+                      <m:jc m:val="centerGroup"/>
+                    </m:oMathParaPr>
+                    <m:oMath xmlns:m="http://schemas.openxmlformats.org/officeDocument/2006/math">
+                      <m:r>
+                        <a:rPr kumimoji="1" lang="en-US" altLang="ja-JP" b="0" i="1" smtClean="0">
+                          <a:latin typeface="Cambria Math" panose="02040503050406030204" pitchFamily="18" charset="0"/>
+                        </a:rPr>
+                        <m:t>𝑐</m:t>
+                      </m:r>
+                    </m:oMath>
+                  </m:oMathPara>
+                </a14:m>
+                <a:endParaRPr kumimoji="1" lang="ja-JP" altLang="en-US" dirty="0"/>
+              </a:p>
+            </p:txBody>
+          </p:sp>
+        </mc:Choice>
+        <mc:Fallback>
+          <p:sp>
+            <p:nvSpPr>
+              <p:cNvPr id="44" name="テキスト ボックス 43">
+                <a:extLst>
+                  <a:ext uri="{FF2B5EF4-FFF2-40B4-BE49-F238E27FC236}">
+                    <a16:creationId xmlns:a16="http://schemas.microsoft.com/office/drawing/2014/main" id="{FC2BED75-0C32-F77A-E9B9-5B51121FBB47}"/>
+                  </a:ext>
+                </a:extLst>
+              </p:cNvPr>
+              <p:cNvSpPr txBox="1">
+                <a:spLocks noRot="1" noChangeAspect="1" noMove="1" noResize="1" noEditPoints="1" noAdjustHandles="1" noChangeArrowheads="1" noChangeShapeType="1" noTextEdit="1"/>
+              </p:cNvSpPr>
+              <p:nvPr/>
+            </p:nvSpPr>
+            <p:spPr>
+              <a:xfrm>
+                <a:off x="4149675" y="2889555"/>
+                <a:ext cx="178832" cy="276999"/>
+              </a:xfrm>
+              <a:prstGeom prst="rect">
+                <a:avLst/>
+              </a:prstGeom>
+              <a:blipFill>
+                <a:blip r:embed="rId4"/>
+                <a:stretch>
+                  <a:fillRect l="-17241" r="-10345"/>
+                </a:stretch>
+              </a:blipFill>
+            </p:spPr>
+            <p:txBody>
+              <a:bodyPr/>
+              <a:lstStyle/>
+              <a:p>
+                <a:r>
+                  <a:rPr lang="ja-JP" altLang="en-US">
+                    <a:noFill/>
+                  </a:rPr>
+                  <a:t> </a:t>
+                </a:r>
+              </a:p>
+            </p:txBody>
+          </p:sp>
+        </mc:Fallback>
+      </mc:AlternateContent>
+      <p:cxnSp>
+        <p:nvCxnSpPr>
+          <p:cNvPr id="46" name="直線コネクタ 45">
+            <a:extLst>
+              <a:ext uri="{FF2B5EF4-FFF2-40B4-BE49-F238E27FC236}">
+                <a16:creationId xmlns:a16="http://schemas.microsoft.com/office/drawing/2014/main" id="{525C8744-EFD7-B155-7B63-787DDE87609C}"/>
+              </a:ext>
+            </a:extLst>
+          </p:cNvPr>
+          <p:cNvCxnSpPr>
+            <a:cxnSpLocks/>
+          </p:cNvCxnSpPr>
+          <p:nvPr/>
+        </p:nvCxnSpPr>
+        <p:spPr>
+          <a:xfrm>
+            <a:off x="6171174" y="3093509"/>
+            <a:ext cx="0" cy="213783"/>
+          </a:xfrm>
+          <a:prstGeom prst="line">
+            <a:avLst/>
+          </a:prstGeom>
+        </p:spPr>
+        <p:style>
+          <a:lnRef idx="2">
+            <a:schemeClr val="dk1"/>
+          </a:lnRef>
+          <a:fillRef idx="1">
+            <a:schemeClr val="lt1"/>
+          </a:fillRef>
+          <a:effectRef idx="0">
+            <a:schemeClr val="dk1"/>
+          </a:effectRef>
+          <a:fontRef idx="minor">
+            <a:schemeClr val="dk1"/>
+          </a:fontRef>
+        </p:style>
+      </p:cxnSp>
+      <mc:AlternateContent xmlns:mc="http://schemas.openxmlformats.org/markup-compatibility/2006">
+        <mc:Choice xmlns:a14="http://schemas.microsoft.com/office/drawing/2010/main" Requires="a14">
+          <p:sp>
+            <p:nvSpPr>
+              <p:cNvPr id="48" name="テキスト ボックス 47">
+                <a:extLst>
+                  <a:ext uri="{FF2B5EF4-FFF2-40B4-BE49-F238E27FC236}">
+                    <a16:creationId xmlns:a16="http://schemas.microsoft.com/office/drawing/2014/main" id="{53A06A2A-8B88-99B8-8767-DDF20695E250}"/>
+                  </a:ext>
+                </a:extLst>
+              </p:cNvPr>
+              <p:cNvSpPr txBox="1"/>
+              <p:nvPr/>
+            </p:nvSpPr>
+            <p:spPr>
+              <a:xfrm>
+                <a:off x="6085316" y="3325835"/>
+                <a:ext cx="196144" cy="276999"/>
+              </a:xfrm>
+              <a:prstGeom prst="rect">
+                <a:avLst/>
+              </a:prstGeom>
+              <a:noFill/>
+            </p:spPr>
+            <p:txBody>
+              <a:bodyPr wrap="none" lIns="0" tIns="0" rIns="0" bIns="0" rtlCol="0">
+                <a:spAutoFit/>
+              </a:bodyPr>
+              <a:lstStyle/>
+              <a:p>
+                <a14:m>
+                  <m:oMathPara xmlns:m="http://schemas.openxmlformats.org/officeDocument/2006/math">
+                    <m:oMathParaPr>
+                      <m:jc m:val="centerGroup"/>
+                    </m:oMathParaPr>
+                    <m:oMath xmlns:m="http://schemas.openxmlformats.org/officeDocument/2006/math">
+                      <m:r>
+                        <a:rPr kumimoji="1" lang="en-US" altLang="ja-JP" b="0" i="1" smtClean="0">
+                          <a:latin typeface="Cambria Math" panose="02040503050406030204" pitchFamily="18" charset="0"/>
+                        </a:rPr>
+                        <m:t>𝑥</m:t>
+                      </m:r>
+                    </m:oMath>
+                  </m:oMathPara>
+                </a14:m>
+                <a:endParaRPr kumimoji="1" lang="ja-JP" altLang="en-US" dirty="0"/>
+              </a:p>
+            </p:txBody>
+          </p:sp>
+        </mc:Choice>
+        <mc:Fallback>
+          <p:sp>
+            <p:nvSpPr>
+              <p:cNvPr id="48" name="テキスト ボックス 47">
+                <a:extLst>
+                  <a:ext uri="{FF2B5EF4-FFF2-40B4-BE49-F238E27FC236}">
+                    <a16:creationId xmlns:a16="http://schemas.microsoft.com/office/drawing/2014/main" id="{53A06A2A-8B88-99B8-8767-DDF20695E250}"/>
+                  </a:ext>
+                </a:extLst>
+              </p:cNvPr>
+              <p:cNvSpPr txBox="1">
+                <a:spLocks noRot="1" noChangeAspect="1" noMove="1" noResize="1" noEditPoints="1" noAdjustHandles="1" noChangeArrowheads="1" noChangeShapeType="1" noTextEdit="1"/>
+              </p:cNvSpPr>
+              <p:nvPr/>
+            </p:nvSpPr>
+            <p:spPr>
+              <a:xfrm>
+                <a:off x="6085316" y="3325835"/>
+                <a:ext cx="196144" cy="276999"/>
+              </a:xfrm>
+              <a:prstGeom prst="rect">
+                <a:avLst/>
+              </a:prstGeom>
+              <a:blipFill>
+                <a:blip r:embed="rId5"/>
+                <a:stretch>
+                  <a:fillRect l="-15625" r="-9375"/>
+                </a:stretch>
+              </a:blipFill>
+            </p:spPr>
+            <p:txBody>
+              <a:bodyPr/>
+              <a:lstStyle/>
+              <a:p>
+                <a:r>
+                  <a:rPr lang="ja-JP" altLang="en-US">
+                    <a:noFill/>
+                  </a:rPr>
+                  <a:t> </a:t>
+                </a:r>
+              </a:p>
+            </p:txBody>
+          </p:sp>
+        </mc:Fallback>
+      </mc:AlternateContent>
     </p:spTree>
     <p:extLst>
       <p:ext uri="{BB962C8B-B14F-4D97-AF65-F5344CB8AC3E}">
